--- a/docs/deck/Shortage-Radar-deck.pptx
+++ b/docs/deck/Shortage-Radar-deck.pptx
@@ -1129,7 +1129,7 @@
           <a:p>
             <a:r>
               <a:rPr lang="en-US" dirty="0"/>
-              <a:t>Zetaris is the data layer, Nightshift is the only AI provider. The agent talks to Zetaris over REST and to Nemotron through Nightshift in OpenAI format. TypeScript, Next.js, Docker, 75 tests.</a:t>
+              <a:t>Zetaris is the data layer, Nightshift is the only AI provider. The agent talks to Zetaris over REST and to Nemotron through Nightshift in OpenAI format. TypeScript, Next.js, Docker, 76 tests.</a:t>
             </a:r>
             <a:endParaRPr lang="en-US" dirty="0"/>
           </a:p>
